--- a/modulo-03/03.05 - Definindo Relacionamentos e Associações/03.05_Relacionamentos_e_associações.pptx
+++ b/modulo-03/03.05 - Definindo Relacionamentos e Associações/03.05_Relacionamentos_e_associações.pptx
@@ -1728,7 +1728,7 @@
                   <a:srgbClr val="8FA3C7"/>
                 </a:solidFill>
               </a:rPr>
-              <a:t>ABAP Moderno · Módulo 02 — Modelagem de Dados com Dicionário e CDS  ·  Aula 5 de 7 — Associações</a:t>
+              <a:t>ABAP Moderno · Módulo 03 — Modelagem de Dados com Dicionário e CDS  ·  Aula 5 de 7 — Associações</a:t>
             </a:r>
             <a:endParaRPr lang="en-US" sz="900" dirty="0"/>
           </a:p>
@@ -1874,7 +1874,7 @@
                   <a:srgbClr val="556B82"/>
                 </a:solidFill>
               </a:rPr>
-              <a:t>ABAP Moderno · Módulo 02 — Modelagem de Dados com Dicionário e CDS  ·  Aula 5 de 7 — Associações</a:t>
+              <a:t>ABAP Moderno · Módulo 03 — Modelagem de Dados com Dicionário e CDS  ·  Aula 5 de 7 — Associações</a:t>
             </a:r>
             <a:endParaRPr lang="en-US" sz="900" dirty="0"/>
           </a:p>
@@ -2305,7 +2305,7 @@
                   <a:srgbClr val="89D1FF"/>
                 </a:solidFill>
               </a:rPr>
-              <a:t>MÓDULO 02 · AULA 05 DE 07</a:t>
+              <a:t>MÓDULO 03 · AULA 05 DE 07</a:t>
             </a:r>
             <a:endParaRPr lang="en-US" sz="1400" dirty="0"/>
           </a:p>
@@ -2647,7 +2647,7 @@
                   <a:srgbClr val="8FA3C7"/>
                 </a:solidFill>
               </a:rPr>
-              <a:t>ABAP Moderno · Módulo 02 — Modelagem de Dados com Dicionário e CDS · Design System SAP Horizon</a:t>
+              <a:t>ABAP Moderno · Módulo 03 — Modelagem de Dados com Dicionário e CDS · Design System SAP Horizon</a:t>
             </a:r>
             <a:endParaRPr lang="en-US" sz="1100" dirty="0"/>
           </a:p>
@@ -2836,7 +2836,7 @@
         <p:spPr>
           <a:xfrm>
             <a:off x="640080" y="1700784"/>
-            <a:ext cx="2697480" cy="292608"/>
+            <a:ext cx="2619756" cy="292608"/>
           </a:xfrm>
           <a:prstGeom prst="rect">
             <a:avLst/>
@@ -2856,7 +2856,7 @@
         <p:spPr>
           <a:xfrm>
             <a:off x="640080" y="1700784"/>
-            <a:ext cx="2697480" cy="27432"/>
+            <a:ext cx="2619756" cy="27432"/>
           </a:xfrm>
           <a:prstGeom prst="rect">
             <a:avLst/>
@@ -2876,7 +2876,7 @@
         <p:spPr>
           <a:xfrm>
             <a:off x="731520" y="1719072"/>
-            <a:ext cx="2514600" cy="274320"/>
+            <a:ext cx="2436876" cy="274320"/>
           </a:xfrm>
           <a:prstGeom prst="rect">
             <a:avLst/>
@@ -2897,7 +2897,7 @@
                   <a:srgbClr val="FFFFFF"/>
                 </a:solidFill>
               </a:rPr>
-              <a:t>zs4d430_c_employee.ddls.asddls</a:t>
+              <a:t>zi_pc_pedido_cube.ddls.asddls</a:t>
             </a:r>
             <a:endParaRPr lang="en-US" sz="950" dirty="0"/>
           </a:p>
@@ -2933,7 +2933,7 @@
                   <a:srgbClr val="9DA5B4"/>
                 </a:solidFill>
               </a:rPr>
-              <a:t>ZS4D430_## › Core Data Services</a:t>
+              <a:t>ZI_PC_PEDIDO_CUBE (trecho; `_Cliente` propagada para ilustrar)</a:t>
             </a:r>
             <a:endParaRPr lang="en-US" sz="850" dirty="0"/>
           </a:p>
@@ -3243,7 +3243,7 @@
                 <a:ea typeface="Courier New" pitchFamily="34" charset="-122"/>
                 <a:cs typeface="Courier New" pitchFamily="34" charset="-120"/>
               </a:rPr>
-              <a:t>ZS4D430_C_Employee</a:t>
+              <a:t>ZI_PC_PEDIDO_CUBE</a:t>
             </a:r>
             <a:endParaRPr lang="en-US" sz="1050" dirty="0"/>
           </a:p>
@@ -3340,7 +3340,7 @@
                 <a:ea typeface="Courier New" pitchFamily="34" charset="-122"/>
                 <a:cs typeface="Courier New" pitchFamily="34" charset="-120"/>
               </a:rPr>
-              <a:t>ZS4D430_R_Employee</a:t>
+              <a:t>ZR_PC_PEDIDO</a:t>
             </a:r>
             <a:endParaRPr lang="en-US" sz="1050" dirty="0"/>
           </a:p>
@@ -3413,7 +3413,7 @@
                 <a:ea typeface="Courier New" pitchFamily="34" charset="-122"/>
                 <a:cs typeface="Courier New" pitchFamily="34" charset="-120"/>
               </a:rPr>
-              <a:t>EmployeeId</a:t>
+              <a:t>PedidoUUID</a:t>
             </a:r>
             <a:r>
               <a:rPr lang="en-US" sz="1050" dirty="0">
@@ -3455,7 +3455,7 @@
                 <a:ea typeface="Courier New" pitchFamily="34" charset="-122"/>
                 <a:cs typeface="Courier New" pitchFamily="34" charset="-120"/>
               </a:rPr>
-              <a:t>LastName</a:t>
+              <a:t>NumeroPedido</a:t>
             </a:r>
             <a:r>
               <a:rPr lang="en-US" sz="1050" dirty="0">
@@ -3497,7 +3497,7 @@
                 <a:ea typeface="Courier New" pitchFamily="34" charset="-122"/>
                 <a:cs typeface="Courier New" pitchFamily="34" charset="-120"/>
               </a:rPr>
-              <a:t>_Department</a:t>
+              <a:t>_StatusPedidoTxt</a:t>
             </a:r>
             <a:r>
               <a:rPr lang="en-US" sz="1050" dirty="0">
@@ -3519,7 +3519,7 @@
                 <a:ea typeface="Courier New" pitchFamily="34" charset="-122"/>
                 <a:cs typeface="Courier New" pitchFamily="34" charset="-120"/>
               </a:rPr>
-              <a:t>Description</a:t>
+              <a:t>Descricao</a:t>
             </a:r>
             <a:r>
               <a:rPr lang="en-US" sz="1050" dirty="0">
@@ -3563,7 +3563,7 @@
                 <a:ea typeface="Courier New" pitchFamily="34" charset="-122"/>
                 <a:cs typeface="Courier New" pitchFamily="34" charset="-120"/>
               </a:rPr>
-              <a:t>DepartmentName</a:t>
+              <a:t>StatusPedidoTexto</a:t>
             </a:r>
             <a:r>
               <a:rPr lang="en-US" sz="1050" dirty="0">
@@ -3605,7 +3605,7 @@
                 <a:ea typeface="Courier New" pitchFamily="34" charset="-122"/>
                 <a:cs typeface="Courier New" pitchFamily="34" charset="-120"/>
               </a:rPr>
-              <a:t>_Department</a:t>
+              <a:t>_Cliente</a:t>
             </a:r>
             <a:r>
               <a:rPr lang="en-US" sz="1050" dirty="0">
@@ -3627,7 +3627,7 @@
                 <a:ea typeface="Courier New" pitchFamily="34" charset="-122"/>
                 <a:cs typeface="Courier New" pitchFamily="34" charset="-120"/>
               </a:rPr>
-              <a:t>_Head</a:t>
+              <a:t>_EnderecoPrincipal</a:t>
             </a:r>
             <a:r>
               <a:rPr lang="en-US" sz="1050" dirty="0">
@@ -3649,18 +3649,18 @@
                 <a:ea typeface="Courier New" pitchFamily="34" charset="-122"/>
                 <a:cs typeface="Courier New" pitchFamily="34" charset="-120"/>
               </a:rPr>
-              <a:t>LastName</a:t>
-            </a:r>
-            <a:r>
-              <a:rPr lang="en-US" sz="1050" dirty="0">
-                <a:solidFill>
-                  <a:srgbClr val="CCCCCC"/>
-                </a:solidFill>
-                <a:latin typeface="Courier New" pitchFamily="34" charset="0"/>
-                <a:ea typeface="Courier New" pitchFamily="34" charset="-122"/>
-                <a:cs typeface="Courier New" pitchFamily="34" charset="-120"/>
-              </a:rPr>
-              <a:t>  </a:t>
+              <a:t>Uf</a:t>
+            </a:r>
+            <a:r>
+              <a:rPr lang="en-US" sz="1050" dirty="0">
+                <a:solidFill>
+                  <a:srgbClr val="CCCCCC"/>
+                </a:solidFill>
+                <a:latin typeface="Courier New" pitchFamily="34" charset="0"/>
+                <a:ea typeface="Courier New" pitchFamily="34" charset="-122"/>
+                <a:cs typeface="Courier New" pitchFamily="34" charset="-120"/>
+              </a:rPr>
+              <a:t> </a:t>
             </a:r>
             <a:r>
               <a:rPr lang="en-US" sz="1050" dirty="0">
@@ -3693,7 +3693,7 @@
                 <a:ea typeface="Courier New" pitchFamily="34" charset="-122"/>
                 <a:cs typeface="Courier New" pitchFamily="34" charset="-120"/>
               </a:rPr>
-              <a:t>HeadName</a:t>
+              <a:t>Uf</a:t>
             </a:r>
             <a:r>
               <a:rPr lang="en-US" sz="1050" dirty="0">
@@ -3735,18 +3735,18 @@
                 <a:ea typeface="Courier New" pitchFamily="34" charset="-122"/>
                 <a:cs typeface="Courier New" pitchFamily="34" charset="-120"/>
               </a:rPr>
-              <a:t>_Department</a:t>
-            </a:r>
-            <a:r>
-              <a:rPr lang="en-US" sz="1050" dirty="0">
-                <a:solidFill>
-                  <a:srgbClr val="CCCCCC"/>
-                </a:solidFill>
-                <a:latin typeface="Courier New" pitchFamily="34" charset="0"/>
-                <a:ea typeface="Courier New" pitchFamily="34" charset="-122"/>
-                <a:cs typeface="Courier New" pitchFamily="34" charset="-120"/>
-              </a:rPr>
-              <a:t>                 </a:t>
+              <a:t>_Cliente</a:t>
+            </a:r>
+            <a:r>
+              <a:rPr lang="en-US" sz="1050" dirty="0">
+                <a:solidFill>
+                  <a:srgbClr val="CCCCCC"/>
+                </a:solidFill>
+                <a:latin typeface="Courier New" pitchFamily="34" charset="0"/>
+                <a:ea typeface="Courier New" pitchFamily="34" charset="-122"/>
+                <a:cs typeface="Courier New" pitchFamily="34" charset="-120"/>
+              </a:rPr>
+              <a:t>                       </a:t>
             </a:r>
             <a:r>
               <a:rPr lang="en-US" sz="1050" i="1" dirty="0">
@@ -3923,7 +3923,7 @@
                 <a:ea typeface="Courier New" pitchFamily="34" charset="-122"/>
                 <a:cs typeface="Courier New" pitchFamily="34" charset="-120"/>
               </a:rPr>
-              <a:t>_Department.Description</a:t>
+              <a:t>_StatusPedidoTxt.Descricao</a:t>
             </a:r>
             <a:r>
               <a:rPr lang="en-US" sz="1050" dirty="0">
@@ -3931,7 +3931,7 @@
                   <a:srgbClr val="556B82"/>
                 </a:solidFill>
               </a:rPr>
-              <a:t> lê um campo do alvo da associação.</a:t>
+              <a:t> lê o texto do status na lista de códigos.</a:t>
             </a:r>
             <a:endParaRPr lang="en-US" sz="1400" dirty="0"/>
           </a:p>
@@ -4043,7 +4043,7 @@
                 <a:ea typeface="Courier New" pitchFamily="34" charset="-122"/>
                 <a:cs typeface="Courier New" pitchFamily="34" charset="-120"/>
               </a:rPr>
-              <a:t>_Department._Head.LastName</a:t>
+              <a:t>_Cliente._EnderecoPrincipal.Uf</a:t>
             </a:r>
             <a:r>
               <a:rPr lang="en-US" sz="1050" dirty="0">
@@ -4051,7 +4051,7 @@
                   <a:srgbClr val="556B82"/>
                 </a:solidFill>
               </a:rPr>
-              <a:t> encadeia associações; o join de três fontes é gerado.</a:t>
+              <a:t>: pedido → cliente → endereço principal, com o join gerado.</a:t>
             </a:r>
             <a:endParaRPr lang="en-US" sz="1400" dirty="0"/>
           </a:p>
@@ -4171,7 +4171,7 @@
                 <a:ea typeface="Courier New" pitchFamily="34" charset="-122"/>
                 <a:cs typeface="Courier New" pitchFamily="34" charset="-120"/>
               </a:rPr>
-              <a:t>_Department</a:t>
+              <a:t>_Cliente</a:t>
             </a:r>
             <a:r>
               <a:rPr lang="en-US" sz="1050" dirty="0">
@@ -4581,12 +4581,12 @@
         </p:nvSpPr>
         <p:spPr>
           <a:xfrm>
-            <a:off x="548640" y="2461451"/>
-            <a:ext cx="5410048" cy="2895219"/>
+            <a:off x="548640" y="2568607"/>
+            <a:ext cx="5410048" cy="2680907"/>
           </a:xfrm>
           <a:prstGeom prst="roundRect">
             <a:avLst>
-              <a:gd name="adj" fmla="val 3158"/>
+              <a:gd name="adj" fmla="val 3411"/>
             </a:avLst>
           </a:prstGeom>
           <a:solidFill>
@@ -4615,7 +4615,7 @@
         </p:nvSpPr>
         <p:spPr>
           <a:xfrm>
-            <a:off x="548640" y="2461451"/>
+            <a:off x="548640" y="2568607"/>
             <a:ext cx="5410048" cy="73152"/>
           </a:xfrm>
           <a:prstGeom prst="rect">
@@ -4635,7 +4635,7 @@
         </p:nvSpPr>
         <p:spPr>
           <a:xfrm>
-            <a:off x="777240" y="2735771"/>
+            <a:off x="777240" y="2842927"/>
             <a:ext cx="457200" cy="457200"/>
           </a:xfrm>
           <a:prstGeom prst="roundRect">
@@ -4657,7 +4657,7 @@
         </p:nvSpPr>
         <p:spPr>
           <a:xfrm>
-            <a:off x="1371600" y="2735771"/>
+            <a:off x="1371600" y="2842927"/>
             <a:ext cx="4404208" cy="457200"/>
           </a:xfrm>
           <a:prstGeom prst="rect">
@@ -4693,8 +4693,8 @@
         </p:nvSpPr>
         <p:spPr>
           <a:xfrm>
-            <a:off x="777240" y="3375851"/>
-            <a:ext cx="4952848" cy="1843659"/>
+            <a:off x="777240" y="3483007"/>
+            <a:ext cx="4952848" cy="1629347"/>
           </a:xfrm>
           <a:prstGeom prst="rect">
             <a:avLst/>
@@ -4774,7 +4774,7 @@
                   <a:srgbClr val="1D2D3E"/>
                 </a:solidFill>
               </a:rPr>
-              <a:t>Um departamento com 5 funcionários passa a aparecer 5 vezes</a:t>
+              <a:t>Um pedido com 5 itens passa a aparecer 5 vezes</a:t>
             </a:r>
             <a:endParaRPr lang="en-US" sz="1400" dirty="0"/>
           </a:p>
@@ -4788,12 +4788,12 @@
         </p:nvSpPr>
         <p:spPr>
           <a:xfrm>
-            <a:off x="6233008" y="2461451"/>
-            <a:ext cx="5410048" cy="2895219"/>
+            <a:off x="6233008" y="2568607"/>
+            <a:ext cx="5410048" cy="2680907"/>
           </a:xfrm>
           <a:prstGeom prst="roundRect">
             <a:avLst>
-              <a:gd name="adj" fmla="val 3158"/>
+              <a:gd name="adj" fmla="val 3411"/>
             </a:avLst>
           </a:prstGeom>
           <a:solidFill>
@@ -4822,7 +4822,7 @@
         </p:nvSpPr>
         <p:spPr>
           <a:xfrm>
-            <a:off x="6233008" y="2461451"/>
+            <a:off x="6233008" y="2568607"/>
             <a:ext cx="5410048" cy="73152"/>
           </a:xfrm>
           <a:prstGeom prst="rect">
@@ -4842,7 +4842,7 @@
         </p:nvSpPr>
         <p:spPr>
           <a:xfrm>
-            <a:off x="6461608" y="2735771"/>
+            <a:off x="6461608" y="2842927"/>
             <a:ext cx="457200" cy="457200"/>
           </a:xfrm>
           <a:prstGeom prst="roundRect">
@@ -4864,7 +4864,7 @@
         </p:nvSpPr>
         <p:spPr>
           <a:xfrm>
-            <a:off x="7055968" y="2735771"/>
+            <a:off x="7055968" y="2842927"/>
             <a:ext cx="4404208" cy="457200"/>
           </a:xfrm>
           <a:prstGeom prst="rect">
@@ -4900,8 +4900,8 @@
         </p:nvSpPr>
         <p:spPr>
           <a:xfrm>
-            <a:off x="6461608" y="3375851"/>
-            <a:ext cx="4952848" cy="1843659"/>
+            <a:off x="6461608" y="3483007"/>
+            <a:ext cx="4952848" cy="1629347"/>
           </a:xfrm>
           <a:prstGeom prst="rect">
             <a:avLst/>
@@ -4926,7 +4926,7 @@
                   <a:srgbClr val="1D2D3E"/>
                 </a:solidFill>
               </a:rPr>
-              <a:t>Partir do lado "para um": de funcionário para departamento</a:t>
+              <a:t>Partir do lado "para um": do item para o pedido</a:t>
             </a:r>
             <a:endParaRPr lang="en-US" sz="1400" dirty="0"/>
           </a:p>
@@ -5016,7 +5016,7 @@
                 <a:ea typeface="Courier New" pitchFamily="34" charset="-122"/>
                 <a:cs typeface="Courier New" pitchFamily="34" charset="-120"/>
               </a:rPr>
-              <a:t>_Employee[ Active = 'X' ]</a:t>
+              <a:t>_Endereco[ EnderecoPrincipal = 'X' ]</a:t>
             </a:r>
             <a:endParaRPr lang="en-US" sz="1400" dirty="0"/>
           </a:p>
@@ -5038,7 +5038,7 @@
         </p:blipFill>
         <p:spPr>
           <a:xfrm>
-            <a:off x="6562192" y="2836354"/>
+            <a:off x="6562192" y="2943511"/>
             <a:ext cx="256032" cy="256032"/>
           </a:xfrm>
           <a:prstGeom prst="rect">
@@ -5062,7 +5062,7 @@
         </p:blipFill>
         <p:spPr>
           <a:xfrm>
-            <a:off x="877824" y="2836354"/>
+            <a:off x="877824" y="2943511"/>
             <a:ext cx="256032" cy="256032"/>
           </a:xfrm>
           <a:prstGeom prst="rect">
@@ -5792,7 +5792,7 @@
                   <a:srgbClr val="FFFFFF"/>
                 </a:solidFill>
               </a:rPr>
-              <a:t>O que aprendemos na aula 02.05</a:t>
+              <a:t>O que aprendemos na aula 03.05</a:t>
             </a:r>
             <a:endParaRPr lang="en-US" sz="3200" dirty="0"/>
           </a:p>
@@ -6268,7 +6268,7 @@
                   <a:srgbClr val="89D1FF"/>
                 </a:solidFill>
               </a:rPr>
-              <a:t>Próxima aula · 02.06  </a:t>
+              <a:t>Próxima aula · 03.06  </a:t>
             </a:r>
             <a:r>
               <a:rPr lang="en-US" sz="1500" dirty="0">
@@ -6298,7 +6298,7 @@
         </p:blipFill>
         <p:spPr>
           <a:xfrm>
-            <a:off x="6355080" y="1965960"/>
+            <a:off x="822960" y="1965960"/>
             <a:ext cx="256032" cy="256032"/>
           </a:xfrm>
           <a:prstGeom prst="rect">
@@ -6322,7 +6322,7 @@
         </p:blipFill>
         <p:spPr>
           <a:xfrm>
-            <a:off x="822960" y="1965960"/>
+            <a:off x="6355080" y="1965960"/>
             <a:ext cx="256032" cy="256032"/>
           </a:xfrm>
           <a:prstGeom prst="rect">
@@ -6370,7 +6370,7 @@
         </p:blipFill>
         <p:spPr>
           <a:xfrm>
-            <a:off x="822960" y="3886200"/>
+            <a:off x="6355080" y="2926080"/>
             <a:ext cx="256032" cy="256032"/>
           </a:xfrm>
           <a:prstGeom prst="rect">
@@ -6394,7 +6394,7 @@
         </p:blipFill>
         <p:spPr>
           <a:xfrm>
-            <a:off x="6355080" y="2926080"/>
+            <a:off x="822960" y="3886200"/>
             <a:ext cx="256032" cy="256032"/>
           </a:xfrm>
           <a:prstGeom prst="rect">
@@ -6545,7 +6545,7 @@
                   <a:srgbClr val="1D2D3E"/>
                 </a:solidFill>
               </a:rPr>
-              <a:t>Módulo 02 em 7 aulas: Dicionário e CDS</a:t>
+              <a:t>Módulo 03 em 7 aulas: Dicionário e CDS</a:t>
             </a:r>
             <a:endParaRPr lang="en-US" sz="2800" dirty="0"/>
           </a:p>
@@ -7803,7 +7803,7 @@
                   <a:srgbClr val="1D2D3E"/>
                 </a:solidFill>
               </a:rPr>
-              <a:t>ligamos funcionários e departamentos: primeiro com uma chave estrangeira entre tabelas, depois com associações nas duas direções.</a:t>
+              <a:t>ligamos pedidos, clientes e itens do projeto: primeiro com uma chave estrangeira entre tabelas, depois com associações e path expressions.</a:t>
             </a:r>
             <a:endParaRPr lang="en-US" sz="1400" dirty="0"/>
           </a:p>
@@ -7825,7 +7825,7 @@
         </p:blipFill>
         <p:spPr>
           <a:xfrm>
-            <a:off x="5455768" y="1847088"/>
+            <a:off x="5455768" y="3858768"/>
             <a:ext cx="347472" cy="347472"/>
           </a:xfrm>
           <a:prstGeom prst="rect">
@@ -7873,7 +7873,7 @@
         </p:blipFill>
         <p:spPr>
           <a:xfrm>
-            <a:off x="8275091" y="1847088"/>
+            <a:off x="5455768" y="1847088"/>
             <a:ext cx="347472" cy="347472"/>
           </a:xfrm>
           <a:prstGeom prst="rect">
@@ -7897,7 +7897,7 @@
         </p:blipFill>
         <p:spPr>
           <a:xfrm>
-            <a:off x="2636444" y="3858768"/>
+            <a:off x="11094415" y="1847088"/>
             <a:ext cx="347472" cy="347472"/>
           </a:xfrm>
           <a:prstGeom prst="rect">
@@ -7921,7 +7921,7 @@
         </p:blipFill>
         <p:spPr>
           <a:xfrm>
-            <a:off x="11094415" y="1847088"/>
+            <a:off x="8275091" y="1847088"/>
             <a:ext cx="347472" cy="347472"/>
           </a:xfrm>
           <a:prstGeom prst="rect">
@@ -7945,7 +7945,7 @@
         </p:blipFill>
         <p:spPr>
           <a:xfrm>
-            <a:off x="5455768" y="3858768"/>
+            <a:off x="2636444" y="3858768"/>
             <a:ext cx="347472" cy="347472"/>
           </a:xfrm>
           <a:prstGeom prst="rect">
@@ -8177,7 +8177,7 @@
                   <a:srgbClr val="556B82"/>
                 </a:solidFill>
               </a:rPr>
-              <a:t>Funcionário e departamento têm duas relações: o funcionário </a:t>
+              <a:t>Pedido, cliente e endereço têm relações diferentes: o pedido </a:t>
             </a:r>
             <a:r>
               <a:rPr lang="en-US" sz="1500" b="1" dirty="0">
@@ -8193,7 +8193,7 @@
                   <a:srgbClr val="556B82"/>
                 </a:solidFill>
               </a:rPr>
-              <a:t> a um departamento, e o departamento </a:t>
+              <a:t> a um cliente, e o cliente </a:t>
             </a:r>
             <a:r>
               <a:rPr lang="en-US" sz="1500" b="1" dirty="0">
@@ -8201,7 +8201,7 @@
                   <a:srgbClr val="556B82"/>
                 </a:solidFill>
               </a:rPr>
-              <a:t>é chefiado</a:t>
+              <a:t>tem</a:t>
             </a:r>
             <a:r>
               <a:rPr lang="en-US" sz="1500" dirty="0">
@@ -8209,7 +8209,7 @@
                   <a:srgbClr val="556B82"/>
                 </a:solidFill>
               </a:rPr>
-              <a:t> por um funcionário.</a:t>
+              <a:t> vários endereços, um deles o principal.</a:t>
             </a:r>
             <a:endParaRPr lang="en-US" sz="1400" dirty="0"/>
           </a:p>
@@ -8304,7 +8304,7 @@
                   <a:srgbClr val="1D2D3E"/>
                 </a:solidFill>
               </a:rPr>
-              <a:t>Funcionário → departamento</a:t>
+              <a:t>Pedido → cliente</a:t>
             </a:r>
             <a:endParaRPr lang="en-US" sz="1400" dirty="0"/>
           </a:p>
@@ -8318,7 +8318,7 @@
                   <a:srgbClr val="556B82"/>
                 </a:solidFill>
               </a:rPr>
-              <a:t>Cada funcionário pertence a exatamente um: </a:t>
+              <a:t>Cada pedido pertence a exatamente um cliente: </a:t>
             </a:r>
             <a:r>
               <a:rPr lang="en-US" sz="1300" b="1" dirty="0">
@@ -8334,7 +8334,7 @@
                   <a:srgbClr val="556B82"/>
                 </a:solidFill>
               </a:rPr>
-              <a:t>. No sentido oposto, um departamento tem de zero a muitos funcionários: </a:t>
+              <a:t>. No sentido oposto, um cliente tem de zero a muitos pedidos: </a:t>
             </a:r>
             <a:r>
               <a:rPr lang="en-US" sz="1300" b="1" dirty="0">
@@ -8445,7 +8445,7 @@
                   <a:srgbClr val="1D2D3E"/>
                 </a:solidFill>
               </a:rPr>
-              <a:t>Departamento → chefe</a:t>
+              <a:t>Cliente → endereço principal</a:t>
             </a:r>
             <a:endParaRPr lang="en-US" sz="1400" dirty="0"/>
           </a:p>
@@ -8459,7 +8459,7 @@
                   <a:srgbClr val="556B82"/>
                 </a:solidFill>
               </a:rPr>
-              <a:t>Cada departamento tem um chefe: </a:t>
+              <a:t>Cada cliente tem vários endereços: </a:t>
             </a:r>
             <a:r>
               <a:rPr lang="en-US" sz="1300" b="1" dirty="0">
@@ -8467,7 +8467,23 @@
                   <a:srgbClr val="556B82"/>
                 </a:solidFill>
               </a:rPr>
-              <a:t>1..1</a:t>
+              <a:t>0..</a:t>
+            </a:r>
+            <a:r>
+              <a:rPr lang="en-US" sz="1300" i="1" dirty="0">
+                <a:solidFill>
+                  <a:srgbClr val="556B82"/>
+                </a:solidFill>
+              </a:rPr>
+              <a:t>. Com o filtro `EnderecoPrincipal = 'X'`, a associação `_EnderecoPrincipal` devolve no máximo um: </a:t>
+            </a:r>
+            <a:r>
+              <a:rPr lang="en-US" sz="1300" i="1" dirty="0">
+                <a:solidFill>
+                  <a:srgbClr val="556B82"/>
+                </a:solidFill>
+              </a:rPr>
+              <a:t>0..1</a:t>
             </a:r>
             <a:r>
               <a:rPr lang="en-US" sz="1300" dirty="0">
@@ -8475,23 +8491,7 @@
                   <a:srgbClr val="556B82"/>
                 </a:solidFill>
               </a:rPr>
-              <a:t>. Nem todo funcionário chefia, e ninguém chefia dois: </a:t>
-            </a:r>
-            <a:r>
-              <a:rPr lang="en-US" sz="1300" b="1" dirty="0">
-                <a:solidFill>
-                  <a:srgbClr val="556B82"/>
-                </a:solidFill>
-              </a:rPr>
-              <a:t>0..1</a:t>
-            </a:r>
-            <a:r>
-              <a:rPr lang="en-US" sz="1300" dirty="0">
-                <a:solidFill>
-                  <a:srgbClr val="556B82"/>
-                </a:solidFill>
-              </a:rPr>
-              <a:t>.</a:t>
+              <a:t>*.</a:t>
             </a:r>
             <a:endParaRPr lang="en-US" sz="1400" dirty="0"/>
           </a:p>
@@ -8832,7 +8832,7 @@
                   <a:srgbClr val="89D1FF"/>
                 </a:solidFill>
               </a:rPr>
-              <a:t>AULA 02.05 · SEÇÃO 1</a:t>
+              <a:t>AULA 03.05 · SEÇÃO 1</a:t>
             </a:r>
             <a:endParaRPr lang="en-US" sz="1300" dirty="0"/>
           </a:p>
@@ -9323,7 +9323,7 @@
                   <a:srgbClr val="1D2D3E"/>
                 </a:solidFill>
               </a:rPr>
-              <a:t>A chave estrangeira do funcionário para o departamento</a:t>
+              <a:t>A chave estrangeira do pedido para o cliente</a:t>
             </a:r>
             <a:endParaRPr lang="en-US" sz="2800" dirty="0"/>
           </a:p>
@@ -9387,7 +9387,7 @@
         <p:spPr>
           <a:xfrm>
             <a:off x="640080" y="1700784"/>
-            <a:ext cx="2231136" cy="292608"/>
+            <a:ext cx="2153412" cy="292608"/>
           </a:xfrm>
           <a:prstGeom prst="rect">
             <a:avLst/>
@@ -9407,7 +9407,7 @@
         <p:spPr>
           <a:xfrm>
             <a:off x="640080" y="1700784"/>
-            <a:ext cx="2231136" cy="27432"/>
+            <a:ext cx="2153412" cy="27432"/>
           </a:xfrm>
           <a:prstGeom prst="rect">
             <a:avLst/>
@@ -9427,7 +9427,7 @@
         <p:spPr>
           <a:xfrm>
             <a:off x="731520" y="1719072"/>
-            <a:ext cx="2048256" cy="274320"/>
+            <a:ext cx="1970532" cy="274320"/>
           </a:xfrm>
           <a:prstGeom prst="rect">
             <a:avLst/>
@@ -9448,7 +9448,7 @@
                   <a:srgbClr val="FFFFFF"/>
                 </a:solidFill>
               </a:rPr>
-              <a:t>zs4d430_employ.tabl.abap</a:t>
+              <a:t>zta_pc_pedido.tabl.abap</a:t>
             </a:r>
             <a:endParaRPr lang="en-US" sz="950" dirty="0"/>
           </a:p>
@@ -9484,7 +9484,7 @@
                   <a:srgbClr val="9DA5B4"/>
                 </a:solidFill>
               </a:rPr>
-              <a:t>ZS4D430_## › Dictionary › Database Tables (trecho)</a:t>
+              <a:t>ZTA_PC_PEDIDO (trecho, com a chave estrangeira que o projeto poderia declarar)</a:t>
             </a:r>
             <a:endParaRPr lang="en-US" sz="850" dirty="0"/>
           </a:p>
@@ -9812,7 +9812,7 @@
                 <a:ea typeface="Courier New" pitchFamily="34" charset="-122"/>
                 <a:cs typeface="Courier New" pitchFamily="34" charset="-120"/>
               </a:rPr>
-              <a:t>zs4d430_employ</a:t>
+              <a:t>zta_pc_pedido</a:t>
             </a:r>
             <a:r>
               <a:rPr lang="en-US" sz="1050" dirty="0">
@@ -10061,7 +10061,7 @@
                 <a:ea typeface="Courier New" pitchFamily="34" charset="-122"/>
                 <a:cs typeface="Courier New" pitchFamily="34" charset="-120"/>
               </a:rPr>
-              <a:t>employee_id</a:t>
+              <a:t>pedido_uuid</a:t>
             </a:r>
             <a:r>
               <a:rPr lang="en-US" sz="1050" dirty="0">
@@ -10105,7 +10105,7 @@
                 <a:ea typeface="Courier New" pitchFamily="34" charset="-122"/>
                 <a:cs typeface="Courier New" pitchFamily="34" charset="-120"/>
               </a:rPr>
-              <a:t>zs4d430_employee_id</a:t>
+              <a:t>sysuuid_x16</a:t>
             </a:r>
             <a:r>
               <a:rPr lang="en-US" sz="1050" dirty="0">
@@ -10191,18 +10191,18 @@
                 <a:ea typeface="Courier New" pitchFamily="34" charset="-122"/>
                 <a:cs typeface="Courier New" pitchFamily="34" charset="-120"/>
               </a:rPr>
-              <a:t>first_name</a:t>
-            </a:r>
-            <a:r>
-              <a:rPr lang="en-US" sz="1050" dirty="0">
-                <a:solidFill>
-                  <a:srgbClr val="CCCCCC"/>
-                </a:solidFill>
-                <a:latin typeface="Courier New" pitchFamily="34" charset="0"/>
-                <a:ea typeface="Courier New" pitchFamily="34" charset="-122"/>
-                <a:cs typeface="Courier New" pitchFamily="34" charset="-120"/>
-              </a:rPr>
-              <a:t>      </a:t>
+              <a:t>numero_pedido</a:t>
+            </a:r>
+            <a:r>
+              <a:rPr lang="en-US" sz="1050" dirty="0">
+                <a:solidFill>
+                  <a:srgbClr val="CCCCCC"/>
+                </a:solidFill>
+                <a:latin typeface="Courier New" pitchFamily="34" charset="0"/>
+                <a:ea typeface="Courier New" pitchFamily="34" charset="-122"/>
+                <a:cs typeface="Courier New" pitchFamily="34" charset="-120"/>
+              </a:rPr>
+              <a:t>   </a:t>
             </a:r>
             <a:r>
               <a:rPr lang="en-US" sz="1050" dirty="0">
@@ -10235,7 +10235,62 @@
                 <a:ea typeface="Courier New" pitchFamily="34" charset="-122"/>
                 <a:cs typeface="Courier New" pitchFamily="34" charset="-120"/>
               </a:rPr>
-              <a:t>zs4d430_first_name</a:t>
+              <a:t>abap</a:t>
+            </a:r>
+            <a:r>
+              <a:rPr lang="en-US" sz="1050" dirty="0">
+                <a:solidFill>
+                  <a:srgbClr val="CCCCCC"/>
+                </a:solidFill>
+                <a:latin typeface="Courier New" pitchFamily="34" charset="0"/>
+                <a:ea typeface="Courier New" pitchFamily="34" charset="-122"/>
+                <a:cs typeface="Courier New" pitchFamily="34" charset="-120"/>
+              </a:rPr>
+              <a:t>.</a:t>
+            </a:r>
+            <a:r>
+              <a:rPr lang="en-US" sz="1050" dirty="0">
+                <a:solidFill>
+                  <a:srgbClr val="DCDCAA"/>
+                </a:solidFill>
+                <a:latin typeface="Courier New" pitchFamily="34" charset="0"/>
+                <a:ea typeface="Courier New" pitchFamily="34" charset="-122"/>
+                <a:cs typeface="Courier New" pitchFamily="34" charset="-120"/>
+              </a:rPr>
+              <a:t>char</a:t>
+            </a:r>
+            <a:r>
+              <a:rPr lang="en-US" sz="1050" dirty="0">
+                <a:solidFill>
+                  <a:srgbClr val="CCCCCC"/>
+                </a:solidFill>
+                <a:latin typeface="Courier New" pitchFamily="34" charset="0"/>
+                <a:ea typeface="Courier New" pitchFamily="34" charset="-122"/>
+                <a:cs typeface="Courier New" pitchFamily="34" charset="-120"/>
+              </a:rPr>
+              <a:t>(</a:t>
+            </a:r>
+            <a:r>
+              <a:rPr lang="en-US" sz="1050" dirty="0">
+                <a:solidFill>
+                  <a:srgbClr val="B5CEA8"/>
+                </a:solidFill>
+                <a:latin typeface="Courier New" pitchFamily="34" charset="0"/>
+                <a:ea typeface="Courier New" pitchFamily="34" charset="-122"/>
+                <a:cs typeface="Courier New" pitchFamily="34" charset="-120"/>
+              </a:rPr>
+              <a:t>10</a:t>
+            </a:r>
+            <a:r>
+              <a:rPr lang="en-US" sz="1050" dirty="0">
+                <a:solidFill>
+                  <a:srgbClr val="CCCCCC"/>
+                </a:solidFill>
+                <a:latin typeface="Courier New" pitchFamily="34" charset="0"/>
+                <a:ea typeface="Courier New" pitchFamily="34" charset="-122"/>
+                <a:cs typeface="Courier New" pitchFamily="34" charset="-120"/>
+              </a:rPr>
+              <a:t>)</a:t>
             </a:r>
             <a:r>
               <a:rPr lang="en-US" sz="1050" dirty="0">
@@ -10427,18 +10482,18 @@
                 <a:ea typeface="Courier New" pitchFamily="34" charset="-122"/>
                 <a:cs typeface="Courier New" pitchFamily="34" charset="-120"/>
               </a:rPr>
-              <a:t>department_id</a:t>
-            </a:r>
-            <a:r>
-              <a:rPr lang="en-US" sz="1050" dirty="0">
-                <a:solidFill>
-                  <a:srgbClr val="CCCCCC"/>
-                </a:solidFill>
-                <a:latin typeface="Courier New" pitchFamily="34" charset="0"/>
-                <a:ea typeface="Courier New" pitchFamily="34" charset="-122"/>
-                <a:cs typeface="Courier New" pitchFamily="34" charset="-120"/>
-              </a:rPr>
-              <a:t>   </a:t>
+              <a:t>cliente_uuid</a:t>
+            </a:r>
+            <a:r>
+              <a:rPr lang="en-US" sz="1050" dirty="0">
+                <a:solidFill>
+                  <a:srgbClr val="CCCCCC"/>
+                </a:solidFill>
+                <a:latin typeface="Courier New" pitchFamily="34" charset="0"/>
+                <a:ea typeface="Courier New" pitchFamily="34" charset="-122"/>
+                <a:cs typeface="Courier New" pitchFamily="34" charset="-120"/>
+              </a:rPr>
+              <a:t>    </a:t>
             </a:r>
             <a:r>
               <a:rPr lang="en-US" sz="1050" dirty="0">
@@ -10471,7 +10526,7 @@
                 <a:ea typeface="Courier New" pitchFamily="34" charset="-122"/>
                 <a:cs typeface="Courier New" pitchFamily="34" charset="-120"/>
               </a:rPr>
-              <a:t>zs4d430_department_id</a:t>
+              <a:t>sysuuid_x16</a:t>
             </a:r>
             <a:endParaRPr lang="en-US" sz="1050" dirty="0"/>
           </a:p>
@@ -10667,7 +10722,7 @@
                 <a:ea typeface="Courier New" pitchFamily="34" charset="-122"/>
                 <a:cs typeface="Courier New" pitchFamily="34" charset="-120"/>
               </a:rPr>
-              <a:t>zs4d430_depment</a:t>
+              <a:t>zta_pc_cliente</a:t>
             </a:r>
             <a:endParaRPr lang="en-US" sz="1050" dirty="0"/>
           </a:p>
@@ -10731,6 +10786,28 @@
                 <a:ea typeface="Courier New" pitchFamily="34" charset="-122"/>
                 <a:cs typeface="Courier New" pitchFamily="34" charset="-120"/>
               </a:rPr>
+              <a:t>       </a:t>
+            </a:r>
+            <a:r>
+              <a:rPr lang="en-US" sz="1050" dirty="0">
+                <a:solidFill>
+                  <a:srgbClr val="CCCCCC"/>
+                </a:solidFill>
+                <a:latin typeface="Courier New" pitchFamily="34" charset="0"/>
+                <a:ea typeface="Courier New" pitchFamily="34" charset="-122"/>
+                <a:cs typeface="Courier New" pitchFamily="34" charset="-120"/>
+              </a:rPr>
+              <a:t>=</a:t>
+            </a:r>
+            <a:r>
+              <a:rPr lang="en-US" sz="1050" dirty="0">
+                <a:solidFill>
+                  <a:srgbClr val="CCCCCC"/>
+                </a:solidFill>
+                <a:latin typeface="Courier New" pitchFamily="34" charset="0"/>
+                <a:ea typeface="Courier New" pitchFamily="34" charset="-122"/>
+                <a:cs typeface="Courier New" pitchFamily="34" charset="-120"/>
+              </a:rPr>
               <a:t> </a:t>
             </a:r>
             <a:r>
@@ -10742,29 +10819,7 @@
                 <a:ea typeface="Courier New" pitchFamily="34" charset="-122"/>
                 <a:cs typeface="Courier New" pitchFamily="34" charset="-120"/>
               </a:rPr>
-              <a:t>=</a:t>
-            </a:r>
-            <a:r>
-              <a:rPr lang="en-US" sz="1050" dirty="0">
-                <a:solidFill>
-                  <a:srgbClr val="CCCCCC"/>
-                </a:solidFill>
-                <a:latin typeface="Courier New" pitchFamily="34" charset="0"/>
-                <a:ea typeface="Courier New" pitchFamily="34" charset="-122"/>
-                <a:cs typeface="Courier New" pitchFamily="34" charset="-120"/>
-              </a:rPr>
-              <a:t> </a:t>
-            </a:r>
-            <a:r>
-              <a:rPr lang="en-US" sz="1050" dirty="0">
-                <a:solidFill>
-                  <a:srgbClr val="CCCCCC"/>
-                </a:solidFill>
-                <a:latin typeface="Courier New" pitchFamily="34" charset="0"/>
-                <a:ea typeface="Courier New" pitchFamily="34" charset="-122"/>
-                <a:cs typeface="Courier New" pitchFamily="34" charset="-120"/>
-              </a:rPr>
-              <a:t>zs4d430_employ</a:t>
+              <a:t>zta_pc_pedido</a:t>
             </a:r>
             <a:r>
               <a:rPr lang="en-US" sz="1050" dirty="0">
@@ -10839,18 +10894,18 @@
                 <a:ea typeface="Courier New" pitchFamily="34" charset="-122"/>
                 <a:cs typeface="Courier New" pitchFamily="34" charset="-120"/>
               </a:rPr>
-              <a:t>id</a:t>
-            </a:r>
-            <a:r>
-              <a:rPr lang="en-US" sz="1050" dirty="0">
-                <a:solidFill>
-                  <a:srgbClr val="CCCCCC"/>
-                </a:solidFill>
-                <a:latin typeface="Courier New" pitchFamily="34" charset="0"/>
-                <a:ea typeface="Courier New" pitchFamily="34" charset="-122"/>
-                <a:cs typeface="Courier New" pitchFamily="34" charset="-120"/>
-              </a:rPr>
-              <a:t>     </a:t>
+              <a:t>cliente_uuid</a:t>
+            </a:r>
+            <a:r>
+              <a:rPr lang="en-US" sz="1050" dirty="0">
+                <a:solidFill>
+                  <a:srgbClr val="CCCCCC"/>
+                </a:solidFill>
+                <a:latin typeface="Courier New" pitchFamily="34" charset="0"/>
+                <a:ea typeface="Courier New" pitchFamily="34" charset="-122"/>
+                <a:cs typeface="Courier New" pitchFamily="34" charset="-120"/>
+              </a:rPr>
+              <a:t> </a:t>
             </a:r>
             <a:r>
               <a:rPr lang="en-US" sz="1050" dirty="0">
@@ -10883,7 +10938,7 @@
                 <a:ea typeface="Courier New" pitchFamily="34" charset="-122"/>
                 <a:cs typeface="Courier New" pitchFamily="34" charset="-120"/>
               </a:rPr>
-              <a:t>zs4d430_employ</a:t>
+              <a:t>zta_pc_pedido</a:t>
             </a:r>
             <a:r>
               <a:rPr lang="en-US" sz="1050" dirty="0">
@@ -10905,7 +10960,7 @@
                 <a:ea typeface="Courier New" pitchFamily="34" charset="-122"/>
                 <a:cs typeface="Courier New" pitchFamily="34" charset="-120"/>
               </a:rPr>
-              <a:t>department_id</a:t>
+              <a:t>cliente_uuid</a:t>
             </a:r>
             <a:r>
               <a:rPr lang="en-US" sz="1050" dirty="0">
@@ -11082,7 +11137,7 @@
                 <a:ea typeface="Courier New" pitchFamily="34" charset="-122"/>
                 <a:cs typeface="Courier New" pitchFamily="34" charset="-120"/>
               </a:rPr>
-              <a:t>zs4d430_depment</a:t>
+              <a:t>zta_pc_cliente</a:t>
             </a:r>
             <a:r>
               <a:rPr lang="en-US" sz="1050" dirty="0">
@@ -11090,7 +11145,7 @@
                   <a:srgbClr val="556B82"/>
                 </a:solidFill>
               </a:rPr>
-              <a:t>: só valores que existem nela são válidos.</a:t>
+              <a:t>: só clientes que existem nela são válidos.</a:t>
             </a:r>
             <a:endParaRPr lang="en-US" sz="1400" dirty="0"/>
           </a:p>
@@ -11202,7 +11257,7 @@
                   <a:srgbClr val="556B82"/>
                 </a:solidFill>
               </a:rPr>
-              <a:t>Muitos funcionários por departamento; todo funcionário em exatamente um.</a:t>
+              <a:t>Muitos pedidos por cliente; todo pedido de exatamente um cliente.</a:t>
             </a:r>
             <a:endParaRPr lang="en-US" sz="1400" dirty="0"/>
           </a:p>
@@ -11557,7 +11612,26 @@
                   <a:srgbClr val="1D2D3E"/>
                 </a:solidFill>
               </a:rPr>
-              <a:t> viram constraints no banco. No RAP, associações e validações fazem esse papel.</a:t>
+              <a:t> viram constraints no banco. No projeto, a validação </a:t>
+            </a:r>
+            <a:r>
+              <a:rPr lang="en-US" sz="1200" dirty="0">
+                <a:solidFill>
+                  <a:srgbClr val="0064D9"/>
+                </a:solidFill>
+                <a:latin typeface="Courier New" pitchFamily="34" charset="0"/>
+                <a:ea typeface="Courier New" pitchFamily="34" charset="-122"/>
+                <a:cs typeface="Courier New" pitchFamily="34" charset="-120"/>
+              </a:rPr>
+              <a:t>ValidarCliente</a:t>
+            </a:r>
+            <a:r>
+              <a:rPr lang="en-US" sz="1200" dirty="0">
+                <a:solidFill>
+                  <a:srgbClr val="1D2D3E"/>
+                </a:solidFill>
+              </a:rPr>
+              <a:t> do BO Pedido faz esse papel.</a:t>
             </a:r>
             <a:endParaRPr lang="en-US" sz="1400" dirty="0"/>
           </a:p>
@@ -11709,7 +11783,7 @@
                   <a:srgbClr val="89D1FF"/>
                 </a:solidFill>
               </a:rPr>
-              <a:t>AULA 02.05 · SEÇÃO 2</a:t>
+              <a:t>AULA 03.05 · SEÇÃO 2</a:t>
             </a:r>
             <a:endParaRPr lang="en-US" sz="1300" dirty="0"/>
           </a:p>
@@ -12280,7 +12354,7 @@
         <p:spPr>
           <a:xfrm>
             <a:off x="640080" y="1700784"/>
-            <a:ext cx="2697480" cy="292608"/>
+            <a:ext cx="2231136" cy="292608"/>
           </a:xfrm>
           <a:prstGeom prst="rect">
             <a:avLst/>
@@ -12300,7 +12374,7 @@
         <p:spPr>
           <a:xfrm>
             <a:off x="640080" y="1700784"/>
-            <a:ext cx="2697480" cy="27432"/>
+            <a:ext cx="2231136" cy="27432"/>
           </a:xfrm>
           <a:prstGeom prst="rect">
             <a:avLst/>
@@ -12320,7 +12394,7 @@
         <p:spPr>
           <a:xfrm>
             <a:off x="731520" y="1719072"/>
-            <a:ext cx="2514600" cy="274320"/>
+            <a:ext cx="2048256" cy="274320"/>
           </a:xfrm>
           <a:prstGeom prst="rect">
             <a:avLst/>
@@ -12341,7 +12415,7 @@
                   <a:srgbClr val="FFFFFF"/>
                 </a:solidFill>
               </a:rPr>
-              <a:t>zs4d430_r_employee.ddls.asddls</a:t>
+              <a:t>zr_pc_pedido.ddls.asddls</a:t>
             </a:r>
             <a:endParaRPr lang="en-US" sz="950" dirty="0"/>
           </a:p>
@@ -12377,7 +12451,7 @@
                   <a:srgbClr val="9DA5B4"/>
                 </a:solidFill>
               </a:rPr>
-              <a:t>ZS4D430_## › Core Data Services (trechos)</a:t>
+              <a:t>ZR_PC_PEDIDO (real) e ZR_PC_CLIENTE (associação inversa ilustrativa)</a:t>
             </a:r>
             <a:endParaRPr lang="en-US" sz="850" dirty="0"/>
           </a:p>
@@ -12843,6 +12917,28 @@
                 <a:ea typeface="Courier New" pitchFamily="34" charset="-122"/>
                 <a:cs typeface="Courier New" pitchFamily="34" charset="-120"/>
               </a:rPr>
+              <a:t>root</a:t>
+            </a:r>
+            <a:r>
+              <a:rPr lang="en-US" sz="950" dirty="0">
+                <a:solidFill>
+                  <a:srgbClr val="CCCCCC"/>
+                </a:solidFill>
+                <a:latin typeface="Courier New" pitchFamily="34" charset="0"/>
+                <a:ea typeface="Courier New" pitchFamily="34" charset="-122"/>
+                <a:cs typeface="Courier New" pitchFamily="34" charset="-120"/>
+              </a:rPr>
+              <a:t> </a:t>
+            </a:r>
+            <a:r>
+              <a:rPr lang="en-US" sz="950" dirty="0">
+                <a:solidFill>
+                  <a:srgbClr val="569CD6"/>
+                </a:solidFill>
+                <a:latin typeface="Courier New" pitchFamily="34" charset="0"/>
+                <a:ea typeface="Courier New" pitchFamily="34" charset="-122"/>
+                <a:cs typeface="Courier New" pitchFamily="34" charset="-120"/>
+              </a:rPr>
               <a:t>view</a:t>
             </a:r>
             <a:r>
@@ -12887,7 +12983,7 @@
                 <a:ea typeface="Courier New" pitchFamily="34" charset="-122"/>
                 <a:cs typeface="Courier New" pitchFamily="34" charset="-120"/>
               </a:rPr>
-              <a:t>ZS4D430_R_Employee</a:t>
+              <a:t>ZR_PC_PEDIDO</a:t>
             </a:r>
             <a:endParaRPr lang="en-US" sz="950" dirty="0"/>
           </a:p>
@@ -12984,7 +13080,7 @@
                 <a:ea typeface="Courier New" pitchFamily="34" charset="-122"/>
                 <a:cs typeface="Courier New" pitchFamily="34" charset="-120"/>
               </a:rPr>
-              <a:t>zs4d430_employ</a:t>
+              <a:t>zta_pc_pedido</a:t>
             </a:r>
             <a:endParaRPr lang="en-US" sz="950" dirty="0"/>
           </a:p>
@@ -13048,6 +13144,39 @@
                 <a:ea typeface="Courier New" pitchFamily="34" charset="-122"/>
                 <a:cs typeface="Courier New" pitchFamily="34" charset="-120"/>
               </a:rPr>
+              <a:t>0</a:t>
+            </a:r>
+            <a:r>
+              <a:rPr lang="en-US" sz="950" dirty="0">
+                <a:solidFill>
+                  <a:srgbClr val="CCCCCC"/>
+                </a:solidFill>
+                <a:latin typeface="Courier New" pitchFamily="34" charset="0"/>
+                <a:ea typeface="Courier New" pitchFamily="34" charset="-122"/>
+                <a:cs typeface="Courier New" pitchFamily="34" charset="-120"/>
+              </a:rPr>
+              <a:t>.</a:t>
+            </a:r>
+            <a:r>
+              <a:rPr lang="en-US" sz="950" dirty="0">
+                <a:solidFill>
+                  <a:srgbClr val="CCCCCC"/>
+                </a:solidFill>
+                <a:latin typeface="Courier New" pitchFamily="34" charset="0"/>
+                <a:ea typeface="Courier New" pitchFamily="34" charset="-122"/>
+                <a:cs typeface="Courier New" pitchFamily="34" charset="-120"/>
+              </a:rPr>
+              <a:t>.</a:t>
+            </a:r>
+            <a:r>
+              <a:rPr lang="en-US" sz="950" dirty="0">
+                <a:solidFill>
+                  <a:srgbClr val="B5CEA8"/>
+                </a:solidFill>
+                <a:latin typeface="Courier New" pitchFamily="34" charset="0"/>
+                <a:ea typeface="Courier New" pitchFamily="34" charset="-122"/>
+                <a:cs typeface="Courier New" pitchFamily="34" charset="-120"/>
+              </a:rPr>
               <a:t>1</a:t>
             </a:r>
             <a:r>
@@ -13059,7 +13188,7 @@
                 <a:ea typeface="Courier New" pitchFamily="34" charset="-122"/>
                 <a:cs typeface="Courier New" pitchFamily="34" charset="-120"/>
               </a:rPr>
-              <a:t>.</a:t>
+              <a:t>]</a:t>
             </a:r>
             <a:r>
               <a:rPr lang="en-US" sz="950" dirty="0">
@@ -13070,18 +13199,18 @@
                 <a:ea typeface="Courier New" pitchFamily="34" charset="-122"/>
                 <a:cs typeface="Courier New" pitchFamily="34" charset="-120"/>
               </a:rPr>
-              <a:t>.</a:t>
+              <a:t> </a:t>
             </a:r>
             <a:r>
               <a:rPr lang="en-US" sz="950" dirty="0">
                 <a:solidFill>
-                  <a:srgbClr val="B5CEA8"/>
-                </a:solidFill>
-                <a:latin typeface="Courier New" pitchFamily="34" charset="0"/>
-                <a:ea typeface="Courier New" pitchFamily="34" charset="-122"/>
-                <a:cs typeface="Courier New" pitchFamily="34" charset="-120"/>
-              </a:rPr>
-              <a:t>1</a:t>
+                  <a:srgbClr val="569CD6"/>
+                </a:solidFill>
+                <a:latin typeface="Courier New" pitchFamily="34" charset="0"/>
+                <a:ea typeface="Courier New" pitchFamily="34" charset="-122"/>
+                <a:cs typeface="Courier New" pitchFamily="34" charset="-120"/>
+              </a:rPr>
+              <a:t>to</a:t>
             </a:r>
             <a:r>
               <a:rPr lang="en-US" sz="950" dirty="0">
@@ -13092,7 +13221,7 @@
                 <a:ea typeface="Courier New" pitchFamily="34" charset="-122"/>
                 <a:cs typeface="Courier New" pitchFamily="34" charset="-120"/>
               </a:rPr>
-              <a:t>]</a:t>
+              <a:t> </a:t>
             </a:r>
             <a:r>
               <a:rPr lang="en-US" sz="950" dirty="0">
@@ -13103,6 +13232,17 @@
                 <a:ea typeface="Courier New" pitchFamily="34" charset="-122"/>
                 <a:cs typeface="Courier New" pitchFamily="34" charset="-120"/>
               </a:rPr>
+              <a:t>ZR_PC_CLIENTE</a:t>
+            </a:r>
+            <a:r>
+              <a:rPr lang="en-US" sz="950" dirty="0">
+                <a:solidFill>
+                  <a:srgbClr val="CCCCCC"/>
+                </a:solidFill>
+                <a:latin typeface="Courier New" pitchFamily="34" charset="0"/>
+                <a:ea typeface="Courier New" pitchFamily="34" charset="-122"/>
+                <a:cs typeface="Courier New" pitchFamily="34" charset="-120"/>
+              </a:rPr>
               <a:t> </a:t>
             </a:r>
             <a:r>
@@ -13114,7 +13254,7 @@
                 <a:ea typeface="Courier New" pitchFamily="34" charset="-122"/>
                 <a:cs typeface="Courier New" pitchFamily="34" charset="-120"/>
               </a:rPr>
-              <a:t>to</a:t>
+              <a:t>as</a:t>
             </a:r>
             <a:r>
               <a:rPr lang="en-US" sz="950" dirty="0">
@@ -13136,51 +13276,7 @@
                 <a:ea typeface="Courier New" pitchFamily="34" charset="-122"/>
                 <a:cs typeface="Courier New" pitchFamily="34" charset="-120"/>
               </a:rPr>
-              <a:t>ZS4D430_R_Department</a:t>
-            </a:r>
-            <a:r>
-              <a:rPr lang="en-US" sz="950" dirty="0">
-                <a:solidFill>
-                  <a:srgbClr val="CCCCCC"/>
-                </a:solidFill>
-                <a:latin typeface="Courier New" pitchFamily="34" charset="0"/>
-                <a:ea typeface="Courier New" pitchFamily="34" charset="-122"/>
-                <a:cs typeface="Courier New" pitchFamily="34" charset="-120"/>
-              </a:rPr>
-              <a:t> </a:t>
-            </a:r>
-            <a:r>
-              <a:rPr lang="en-US" sz="950" dirty="0">
-                <a:solidFill>
-                  <a:srgbClr val="569CD6"/>
-                </a:solidFill>
-                <a:latin typeface="Courier New" pitchFamily="34" charset="0"/>
-                <a:ea typeface="Courier New" pitchFamily="34" charset="-122"/>
-                <a:cs typeface="Courier New" pitchFamily="34" charset="-120"/>
-              </a:rPr>
-              <a:t>as</a:t>
-            </a:r>
-            <a:r>
-              <a:rPr lang="en-US" sz="950" dirty="0">
-                <a:solidFill>
-                  <a:srgbClr val="CCCCCC"/>
-                </a:solidFill>
-                <a:latin typeface="Courier New" pitchFamily="34" charset="0"/>
-                <a:ea typeface="Courier New" pitchFamily="34" charset="-122"/>
-                <a:cs typeface="Courier New" pitchFamily="34" charset="-120"/>
-              </a:rPr>
-              <a:t> </a:t>
-            </a:r>
-            <a:r>
-              <a:rPr lang="en-US" sz="950" dirty="0">
-                <a:solidFill>
-                  <a:srgbClr val="CCCCCC"/>
-                </a:solidFill>
-                <a:latin typeface="Courier New" pitchFamily="34" charset="0"/>
-                <a:ea typeface="Courier New" pitchFamily="34" charset="-122"/>
-                <a:cs typeface="Courier New" pitchFamily="34" charset="-120"/>
-              </a:rPr>
-              <a:t>_Department</a:t>
+              <a:t>_Cliente</a:t>
             </a:r>
             <a:endParaRPr lang="en-US" sz="950" dirty="0"/>
           </a:p>
@@ -13233,7 +13329,7 @@
                 <a:ea typeface="Courier New" pitchFamily="34" charset="-122"/>
                 <a:cs typeface="Courier New" pitchFamily="34" charset="-120"/>
               </a:rPr>
-              <a:t>$projection.DepartmentId</a:t>
+              <a:t>$projection.ClienteUUID</a:t>
             </a:r>
             <a:r>
               <a:rPr lang="en-US" sz="950" dirty="0">
@@ -13277,7 +13373,7 @@
                 <a:ea typeface="Courier New" pitchFamily="34" charset="-122"/>
                 <a:cs typeface="Courier New" pitchFamily="34" charset="-120"/>
               </a:rPr>
-              <a:t>_Department</a:t>
+              <a:t>_Cliente</a:t>
             </a:r>
             <a:r>
               <a:rPr lang="en-US" sz="950" dirty="0">
@@ -13299,7 +13395,7 @@
                 <a:ea typeface="Courier New" pitchFamily="34" charset="-122"/>
                 <a:cs typeface="Courier New" pitchFamily="34" charset="-120"/>
               </a:rPr>
-              <a:t>Id</a:t>
+              <a:t>ClienteUUID</a:t>
             </a:r>
             <a:endParaRPr lang="en-US" sz="950" dirty="0"/>
           </a:p>
@@ -13372,7 +13468,7 @@
                 <a:ea typeface="Courier New" pitchFamily="34" charset="-122"/>
                 <a:cs typeface="Courier New" pitchFamily="34" charset="-120"/>
               </a:rPr>
-              <a:t>employee_id</a:t>
+              <a:t>pedido_uuid</a:t>
             </a:r>
             <a:r>
               <a:rPr lang="en-US" sz="950" dirty="0">
@@ -13416,7 +13512,7 @@
                 <a:ea typeface="Courier New" pitchFamily="34" charset="-122"/>
                 <a:cs typeface="Courier New" pitchFamily="34" charset="-120"/>
               </a:rPr>
-              <a:t>EmployeeId</a:t>
+              <a:t>PedidoUUID</a:t>
             </a:r>
             <a:r>
               <a:rPr lang="en-US" sz="950" dirty="0">
@@ -13458,7 +13554,7 @@
                 <a:ea typeface="Courier New" pitchFamily="34" charset="-122"/>
                 <a:cs typeface="Courier New" pitchFamily="34" charset="-120"/>
               </a:rPr>
-              <a:t>last_name</a:t>
+              <a:t>numero_pedido</a:t>
             </a:r>
             <a:r>
               <a:rPr lang="en-US" sz="950" dirty="0">
@@ -13469,7 +13565,7 @@
                 <a:ea typeface="Courier New" pitchFamily="34" charset="-122"/>
                 <a:cs typeface="Courier New" pitchFamily="34" charset="-120"/>
               </a:rPr>
-              <a:t>     </a:t>
+              <a:t> </a:t>
             </a:r>
             <a:r>
               <a:rPr lang="en-US" sz="950" dirty="0">
@@ -13502,7 +13598,7 @@
                 <a:ea typeface="Courier New" pitchFamily="34" charset="-122"/>
                 <a:cs typeface="Courier New" pitchFamily="34" charset="-120"/>
               </a:rPr>
-              <a:t>LastName</a:t>
+              <a:t>NumeroPedido</a:t>
             </a:r>
             <a:r>
               <a:rPr lang="en-US" sz="950" dirty="0">
@@ -13544,7 +13640,7 @@
                 <a:ea typeface="Courier New" pitchFamily="34" charset="-122"/>
                 <a:cs typeface="Courier New" pitchFamily="34" charset="-120"/>
               </a:rPr>
-              <a:t>department_id</a:t>
+              <a:t>cliente_uuid</a:t>
             </a:r>
             <a:r>
               <a:rPr lang="en-US" sz="950" dirty="0">
@@ -13555,40 +13651,40 @@
                 <a:ea typeface="Courier New" pitchFamily="34" charset="-122"/>
                 <a:cs typeface="Courier New" pitchFamily="34" charset="-120"/>
               </a:rPr>
+              <a:t>  </a:t>
+            </a:r>
+            <a:r>
+              <a:rPr lang="en-US" sz="950" dirty="0">
+                <a:solidFill>
+                  <a:srgbClr val="569CD6"/>
+                </a:solidFill>
+                <a:latin typeface="Courier New" pitchFamily="34" charset="0"/>
+                <a:ea typeface="Courier New" pitchFamily="34" charset="-122"/>
+                <a:cs typeface="Courier New" pitchFamily="34" charset="-120"/>
+              </a:rPr>
+              <a:t>as</a:t>
+            </a:r>
+            <a:r>
+              <a:rPr lang="en-US" sz="950" dirty="0">
+                <a:solidFill>
+                  <a:srgbClr val="CCCCCC"/>
+                </a:solidFill>
+                <a:latin typeface="Courier New" pitchFamily="34" charset="0"/>
+                <a:ea typeface="Courier New" pitchFamily="34" charset="-122"/>
+                <a:cs typeface="Courier New" pitchFamily="34" charset="-120"/>
+              </a:rPr>
               <a:t> </a:t>
             </a:r>
             <a:r>
               <a:rPr lang="en-US" sz="950" dirty="0">
                 <a:solidFill>
-                  <a:srgbClr val="569CD6"/>
-                </a:solidFill>
-                <a:latin typeface="Courier New" pitchFamily="34" charset="0"/>
-                <a:ea typeface="Courier New" pitchFamily="34" charset="-122"/>
-                <a:cs typeface="Courier New" pitchFamily="34" charset="-120"/>
-              </a:rPr>
-              <a:t>as</a:t>
-            </a:r>
-            <a:r>
-              <a:rPr lang="en-US" sz="950" dirty="0">
-                <a:solidFill>
-                  <a:srgbClr val="CCCCCC"/>
-                </a:solidFill>
-                <a:latin typeface="Courier New" pitchFamily="34" charset="0"/>
-                <a:ea typeface="Courier New" pitchFamily="34" charset="-122"/>
-                <a:cs typeface="Courier New" pitchFamily="34" charset="-120"/>
-              </a:rPr>
-              <a:t> </a:t>
-            </a:r>
-            <a:r>
-              <a:rPr lang="en-US" sz="950" dirty="0">
-                <a:solidFill>
-                  <a:srgbClr val="CCCCCC"/>
-                </a:solidFill>
-                <a:latin typeface="Courier New" pitchFamily="34" charset="0"/>
-                <a:ea typeface="Courier New" pitchFamily="34" charset="-122"/>
-                <a:cs typeface="Courier New" pitchFamily="34" charset="-120"/>
-              </a:rPr>
-              <a:t>DepartmentId</a:t>
+                  <a:srgbClr val="CCCCCC"/>
+                </a:solidFill>
+                <a:latin typeface="Courier New" pitchFamily="34" charset="0"/>
+                <a:ea typeface="Courier New" pitchFamily="34" charset="-122"/>
+                <a:cs typeface="Courier New" pitchFamily="34" charset="-120"/>
+              </a:rPr>
+              <a:t>ClienteUUID</a:t>
             </a:r>
             <a:r>
               <a:rPr lang="en-US" sz="950" dirty="0">
@@ -13630,7 +13726,7 @@
                 <a:ea typeface="Courier New" pitchFamily="34" charset="-122"/>
                 <a:cs typeface="Courier New" pitchFamily="34" charset="-120"/>
               </a:rPr>
-              <a:t>_Department</a:t>
+              <a:t>_Cliente</a:t>
             </a:r>
             <a:r>
               <a:rPr lang="en-US" sz="950" dirty="0">
@@ -13641,7 +13737,7 @@
                 <a:ea typeface="Courier New" pitchFamily="34" charset="-122"/>
                 <a:cs typeface="Courier New" pitchFamily="34" charset="-120"/>
               </a:rPr>
-              <a:t>                         </a:t>
+              <a:t>                            </a:t>
             </a:r>
             <a:r>
               <a:rPr lang="en-US" sz="950" i="1" dirty="0">
@@ -13734,6 +13830,28 @@
                 <a:ea typeface="Courier New" pitchFamily="34" charset="-122"/>
                 <a:cs typeface="Courier New" pitchFamily="34" charset="-120"/>
               </a:rPr>
+              <a:t>root</a:t>
+            </a:r>
+            <a:r>
+              <a:rPr lang="en-US" sz="950" dirty="0">
+                <a:solidFill>
+                  <a:srgbClr val="CCCCCC"/>
+                </a:solidFill>
+                <a:latin typeface="Courier New" pitchFamily="34" charset="0"/>
+                <a:ea typeface="Courier New" pitchFamily="34" charset="-122"/>
+                <a:cs typeface="Courier New" pitchFamily="34" charset="-120"/>
+              </a:rPr>
+              <a:t> </a:t>
+            </a:r>
+            <a:r>
+              <a:rPr lang="en-US" sz="950" dirty="0">
+                <a:solidFill>
+                  <a:srgbClr val="569CD6"/>
+                </a:solidFill>
+                <a:latin typeface="Courier New" pitchFamily="34" charset="0"/>
+                <a:ea typeface="Courier New" pitchFamily="34" charset="-122"/>
+                <a:cs typeface="Courier New" pitchFamily="34" charset="-120"/>
+              </a:rPr>
               <a:t>view</a:t>
             </a:r>
             <a:r>
@@ -13778,7 +13896,7 @@
                 <a:ea typeface="Courier New" pitchFamily="34" charset="-122"/>
                 <a:cs typeface="Courier New" pitchFamily="34" charset="-120"/>
               </a:rPr>
-              <a:t>ZS4D430_R_Department</a:t>
+              <a:t>ZR_PC_CLIENTE</a:t>
             </a:r>
             <a:endParaRPr lang="en-US" sz="950" dirty="0"/>
           </a:p>
@@ -13875,7 +13993,7 @@
                 <a:ea typeface="Courier New" pitchFamily="34" charset="-122"/>
                 <a:cs typeface="Courier New" pitchFamily="34" charset="-120"/>
               </a:rPr>
-              <a:t>zs4d430_depment</a:t>
+              <a:t>zta_pc_cliente</a:t>
             </a:r>
             <a:endParaRPr lang="en-US" sz="950" dirty="0"/>
           </a:p>
@@ -14027,7 +14145,7 @@
                 <a:ea typeface="Courier New" pitchFamily="34" charset="-122"/>
                 <a:cs typeface="Courier New" pitchFamily="34" charset="-120"/>
               </a:rPr>
-              <a:t>ZS4D430_R_Employee</a:t>
+              <a:t>ZR_PC_PEDIDO</a:t>
             </a:r>
             <a:r>
               <a:rPr lang="en-US" sz="950" dirty="0">
@@ -14071,7 +14189,7 @@
                 <a:ea typeface="Courier New" pitchFamily="34" charset="-122"/>
                 <a:cs typeface="Courier New" pitchFamily="34" charset="-120"/>
               </a:rPr>
-              <a:t>_Employee</a:t>
+              <a:t>_Pedidos</a:t>
             </a:r>
             <a:endParaRPr lang="en-US" sz="950" dirty="0"/>
           </a:p>
@@ -14124,7 +14242,7 @@
                 <a:ea typeface="Courier New" pitchFamily="34" charset="-122"/>
                 <a:cs typeface="Courier New" pitchFamily="34" charset="-120"/>
               </a:rPr>
-              <a:t>$projection.Id</a:t>
+              <a:t>$projection.ClienteUUID</a:t>
             </a:r>
             <a:r>
               <a:rPr lang="en-US" sz="950" dirty="0">
@@ -14168,7 +14286,7 @@
                 <a:ea typeface="Courier New" pitchFamily="34" charset="-122"/>
                 <a:cs typeface="Courier New" pitchFamily="34" charset="-120"/>
               </a:rPr>
-              <a:t>_Employee</a:t>
+              <a:t>_Pedidos</a:t>
             </a:r>
             <a:r>
               <a:rPr lang="en-US" sz="950" dirty="0">
@@ -14190,7 +14308,7 @@
                 <a:ea typeface="Courier New" pitchFamily="34" charset="-122"/>
                 <a:cs typeface="Courier New" pitchFamily="34" charset="-120"/>
               </a:rPr>
-              <a:t>DepartmentId</a:t>
+              <a:t>ClienteUUID</a:t>
             </a:r>
             <a:endParaRPr lang="en-US" sz="950" dirty="0"/>
           </a:p>
@@ -14263,7 +14381,7 @@
                 <a:ea typeface="Courier New" pitchFamily="34" charset="-122"/>
                 <a:cs typeface="Courier New" pitchFamily="34" charset="-120"/>
               </a:rPr>
-              <a:t>id</a:t>
+              <a:t>cliente_uuid</a:t>
             </a:r>
             <a:r>
               <a:rPr lang="en-US" sz="950" dirty="0">
@@ -14307,7 +14425,7 @@
                 <a:ea typeface="Courier New" pitchFamily="34" charset="-122"/>
                 <a:cs typeface="Courier New" pitchFamily="34" charset="-120"/>
               </a:rPr>
-              <a:t>Id</a:t>
+              <a:t>ClienteUUID</a:t>
             </a:r>
             <a:r>
               <a:rPr lang="en-US" sz="950" dirty="0">
@@ -14349,7 +14467,7 @@
                 <a:ea typeface="Courier New" pitchFamily="34" charset="-122"/>
                 <a:cs typeface="Courier New" pitchFamily="34" charset="-120"/>
               </a:rPr>
-              <a:t>_Employee</a:t>
+              <a:t>_Pedidos</a:t>
             </a:r>
             <a:endParaRPr lang="en-US" sz="950" dirty="0"/>
           </a:p>
@@ -14877,7 +14995,7 @@
                 <a:ea typeface="Courier New" pitchFamily="34" charset="-122"/>
                 <a:cs typeface="Courier New" pitchFamily="34" charset="-120"/>
               </a:rPr>
-              <a:t>_Department</a:t>
+              <a:t>_Cliente</a:t>
             </a:r>
             <a:r>
               <a:rPr lang="en-US" sz="1050" dirty="0">
@@ -15333,7 +15451,26 @@
                             <a:srgbClr val="1D2D3E"/>
                           </a:solidFill>
                         </a:rPr>
-                        <a:t>Funcionário → chefe imediato opcional</a:t>
+                        <a:t>Pedido → pagamento (</a:t>
+                      </a:r>
+                      <a:r>
+                        <a:rPr lang="en-US" sz="1100" dirty="0">
+                          <a:solidFill>
+                            <a:srgbClr val="0064D9"/>
+                          </a:solidFill>
+                          <a:latin typeface="Courier New" pitchFamily="34" charset="0"/>
+                          <a:ea typeface="Courier New" pitchFamily="34" charset="-122"/>
+                          <a:cs typeface="Courier New" pitchFamily="34" charset="-120"/>
+                        </a:rPr>
+                        <a:t>_Pagamento</a:t>
+                      </a:r>
+                      <a:r>
+                        <a:rPr lang="en-US" sz="1100" dirty="0">
+                          <a:solidFill>
+                            <a:srgbClr val="1D2D3E"/>
+                          </a:solidFill>
+                        </a:rPr>
+                        <a:t>)</a:t>
                       </a:r>
                       <a:endParaRPr lang="en-US" sz="1200" dirty="0"/>
                     </a:p>
@@ -15467,7 +15604,7 @@
                             <a:srgbClr val="1D2D3E"/>
                           </a:solidFill>
                         </a:rPr>
-                        <a:t>Funcionário → departamento</a:t>
+                        <a:t>Item do pedido → pedido</a:t>
                       </a:r>
                       <a:endParaRPr lang="en-US" sz="1200" dirty="0"/>
                     </a:p>
@@ -15601,7 +15738,26 @@
                             <a:srgbClr val="1D2D3E"/>
                           </a:solidFill>
                         </a:rPr>
-                        <a:t>Departamento → funcionários</a:t>
+                        <a:t>Cliente → endereços (</a:t>
+                      </a:r>
+                      <a:r>
+                        <a:rPr lang="en-US" sz="1100" dirty="0">
+                          <a:solidFill>
+                            <a:srgbClr val="0064D9"/>
+                          </a:solidFill>
+                          <a:latin typeface="Courier New" pitchFamily="34" charset="0"/>
+                          <a:ea typeface="Courier New" pitchFamily="34" charset="-122"/>
+                          <a:cs typeface="Courier New" pitchFamily="34" charset="-120"/>
+                        </a:rPr>
+                        <a:t>_Endereco</a:t>
+                      </a:r>
+                      <a:r>
+                        <a:rPr lang="en-US" sz="1100" dirty="0">
+                          <a:solidFill>
+                            <a:srgbClr val="1D2D3E"/>
+                          </a:solidFill>
+                        </a:rPr>
+                        <a:t>)</a:t>
                       </a:r>
                       <a:endParaRPr lang="en-US" sz="1200" dirty="0"/>
                     </a:p>
@@ -16134,7 +16290,7 @@
                   <a:srgbClr val="89D1FF"/>
                 </a:solidFill>
               </a:rPr>
-              <a:t>AULA 02.05 · SEÇÃO 3</a:t>
+              <a:t>AULA 03.05 · SEÇÃO 3</a:t>
             </a:r>
             <a:endParaRPr lang="en-US" sz="1300" dirty="0"/>
           </a:p>
@@ -16351,7 +16507,7 @@
                 <a:ea typeface="Courier New" pitchFamily="34" charset="-122"/>
                 <a:cs typeface="Courier New" pitchFamily="34" charset="-120"/>
               </a:rPr>
-              <a:t>_Department.Name</a:t>
+              <a:t>_Cliente.Nome</a:t>
             </a:r>
             <a:r>
               <a:rPr lang="en-US" sz="1000" dirty="0">
